--- a/cours/Module Informatique ENS/Département Anglais/ENS 1ère année/TP_Informatique_ENS_1ère_année_EN_03.pptx
+++ b/cours/Module Informatique ENS/Département Anglais/ENS 1ère année/TP_Informatique_ENS_1ère_année_EN_03.pptx
@@ -482,6 +482,811 @@
     </a:lvl9pPr>
   </p:notesStyle>
 </p:notesMaster>
+</file>
+
+<file path=ppt/notesSlides/notesSlide1.xml><?xml version="1.0" encoding="utf-8"?>
+<p:notes xmlns:a="http://schemas.openxmlformats.org/drawingml/2006/main" xmlns:p="http://schemas.openxmlformats.org/presentationml/2006/main" xmlns:r="http://schemas.openxmlformats.org/officeDocument/2006/relationships">
+  <p:cSld>
+    <p:spTree>
+      <p:nvGrpSpPr>
+        <p:cNvPr id="1" name=""/>
+        <p:cNvGrpSpPr/>
+        <p:nvPr/>
+      </p:nvGrpSpPr>
+      <p:grpSpPr>
+        <a:xfrm>
+          <a:off x="0" y="0"/>
+          <a:ext cx="0" cy="0"/>
+          <a:chOff x="0" y="0"/>
+          <a:chExt cx="0" cy="0"/>
+        </a:xfrm>
+      </p:grpSpPr>
+      <p:sp>
+        <p:nvSpPr>
+          <p:cNvPr id="2" name="Slide Image Placeholder 1"/>
+          <p:cNvSpPr>
+            <a:spLocks noGrp="1"/>
+          </p:cNvSpPr>
+          <p:nvPr>
+            <p:ph type="sldImg" idx="2"/>
+          </p:nvPr>
+        </p:nvSpPr>
+        <p:spPr/>
+      </p:sp>
+      <p:sp>
+        <p:nvSpPr>
+          <p:cNvPr id="3" name="Notes Placeholder 2"/>
+          <p:cNvSpPr>
+            <a:spLocks noGrp="1"/>
+          </p:cNvSpPr>
+          <p:nvPr>
+            <p:ph type="body" idx="3" sz="quarter"/>
+          </p:nvPr>
+        </p:nvSpPr>
+        <p:spPr/>
+        <p:txBody>
+          <a:bodyPr/>
+          <a:lstStyle/>
+          <a:p>
+            <a:r>
+              <a:t>TP 03 : Programmation Python</a:t>
+            </a:r>
+          </a:p>
+          <a:p>
+            <a:r>
+              <a:t>Module ENS</a:t>
+            </a:r>
+          </a:p>
+          <a:p>
+            <a:r>
+              <a:t>Dr. BELACEL Madani — Université de Mostaganem</a:t>
+            </a:r>
+          </a:p>
+          <a:p>
+            <a:r>
+              <a:t>Année 2026-2027</a:t>
+            </a:r>
+          </a:p>
+        </p:txBody>
+      </p:sp>
+      <p:sp>
+        <p:nvSpPr>
+          <p:cNvPr id="4" name="Slide Number Placeholder 3"/>
+          <p:cNvSpPr>
+            <a:spLocks noGrp="1"/>
+          </p:cNvSpPr>
+          <p:nvPr>
+            <p:ph type="sldNum" idx="5" sz="quarter"/>
+          </p:nvPr>
+        </p:nvSpPr>
+        <p:spPr/>
+      </p:sp>
+    </p:spTree>
+  </p:cSld>
+  <p:clrMapOvr>
+    <a:masterClrMapping/>
+  </p:clrMapOvr>
+</p:notes>
+</file>
+
+<file path=ppt/notesSlides/notesSlide10.xml><?xml version="1.0" encoding="utf-8"?>
+<p:notes xmlns:a="http://schemas.openxmlformats.org/drawingml/2006/main" xmlns:p="http://schemas.openxmlformats.org/presentationml/2006/main" xmlns:r="http://schemas.openxmlformats.org/officeDocument/2006/relationships">
+  <p:cSld>
+    <p:spTree>
+      <p:nvGrpSpPr>
+        <p:cNvPr id="1" name=""/>
+        <p:cNvGrpSpPr/>
+        <p:nvPr/>
+      </p:nvGrpSpPr>
+      <p:grpSpPr>
+        <a:xfrm>
+          <a:off x="0" y="0"/>
+          <a:ext cx="0" cy="0"/>
+          <a:chOff x="0" y="0"/>
+          <a:chExt cx="0" cy="0"/>
+        </a:xfrm>
+      </p:grpSpPr>
+      <p:sp>
+        <p:nvSpPr>
+          <p:cNvPr id="2" name="Slide Image Placeholder 1"/>
+          <p:cNvSpPr>
+            <a:spLocks noGrp="1"/>
+          </p:cNvSpPr>
+          <p:nvPr>
+            <p:ph type="sldImg" idx="2"/>
+          </p:nvPr>
+        </p:nvSpPr>
+        <p:spPr/>
+      </p:sp>
+      <p:sp>
+        <p:nvSpPr>
+          <p:cNvPr id="3" name="Notes Placeholder 2"/>
+          <p:cNvSpPr>
+            <a:spLocks noGrp="1"/>
+          </p:cNvSpPr>
+          <p:nvPr>
+            <p:ph type="body" idx="3" sz="quarter"/>
+          </p:nvPr>
+        </p:nvSpPr>
+        <p:spPr/>
+        <p:txBody>
+          <a:bodyPr/>
+          <a:lstStyle/>
+          <a:p>
+            <a:r>
+              <a:t>TP 03 — Diapo 10/10</a:t>
+            </a:r>
+          </a:p>
+          <a:p>
+            <a:r>
+              <a:t>Programmation Python</a:t>
+            </a:r>
+          </a:p>
+          <a:p>
+            <a:r>
+              <a:t>Variables, types, fonctions, I/O, bibliothèques standard</a:t>
+            </a:r>
+          </a:p>
+        </p:txBody>
+      </p:sp>
+      <p:sp>
+        <p:nvSpPr>
+          <p:cNvPr id="4" name="Slide Number Placeholder 3"/>
+          <p:cNvSpPr>
+            <a:spLocks noGrp="1"/>
+          </p:cNvSpPr>
+          <p:nvPr>
+            <p:ph type="sldNum" idx="5" sz="quarter"/>
+          </p:nvPr>
+        </p:nvSpPr>
+        <p:spPr/>
+      </p:sp>
+    </p:spTree>
+  </p:cSld>
+  <p:clrMapOvr>
+    <a:masterClrMapping/>
+  </p:clrMapOvr>
+</p:notes>
+</file>
+
+<file path=ppt/notesSlides/notesSlide2.xml><?xml version="1.0" encoding="utf-8"?>
+<p:notes xmlns:a="http://schemas.openxmlformats.org/drawingml/2006/main" xmlns:p="http://schemas.openxmlformats.org/presentationml/2006/main" xmlns:r="http://schemas.openxmlformats.org/officeDocument/2006/relationships">
+  <p:cSld>
+    <p:spTree>
+      <p:nvGrpSpPr>
+        <p:cNvPr id="1" name=""/>
+        <p:cNvGrpSpPr/>
+        <p:nvPr/>
+      </p:nvGrpSpPr>
+      <p:grpSpPr>
+        <a:xfrm>
+          <a:off x="0" y="0"/>
+          <a:ext cx="0" cy="0"/>
+          <a:chOff x="0" y="0"/>
+          <a:chExt cx="0" cy="0"/>
+        </a:xfrm>
+      </p:grpSpPr>
+      <p:sp>
+        <p:nvSpPr>
+          <p:cNvPr id="2" name="Slide Image Placeholder 1"/>
+          <p:cNvSpPr>
+            <a:spLocks noGrp="1"/>
+          </p:cNvSpPr>
+          <p:nvPr>
+            <p:ph type="sldImg" idx="2"/>
+          </p:nvPr>
+        </p:nvSpPr>
+        <p:spPr/>
+      </p:sp>
+      <p:sp>
+        <p:nvSpPr>
+          <p:cNvPr id="3" name="Notes Placeholder 2"/>
+          <p:cNvSpPr>
+            <a:spLocks noGrp="1"/>
+          </p:cNvSpPr>
+          <p:nvPr>
+            <p:ph type="body" idx="3" sz="quarter"/>
+          </p:nvPr>
+        </p:nvSpPr>
+        <p:spPr/>
+        <p:txBody>
+          <a:bodyPr/>
+          <a:lstStyle/>
+          <a:p>
+            <a:r>
+              <a:t>TP 03 — Diapo 2/10</a:t>
+            </a:r>
+          </a:p>
+          <a:p>
+            <a:r>
+              <a:t>Programmation Python</a:t>
+            </a:r>
+          </a:p>
+          <a:p>
+            <a:r>
+              <a:t>Variables, types, fonctions, I/O, bibliothèques standard</a:t>
+            </a:r>
+          </a:p>
+        </p:txBody>
+      </p:sp>
+      <p:sp>
+        <p:nvSpPr>
+          <p:cNvPr id="4" name="Slide Number Placeholder 3"/>
+          <p:cNvSpPr>
+            <a:spLocks noGrp="1"/>
+          </p:cNvSpPr>
+          <p:nvPr>
+            <p:ph type="sldNum" idx="5" sz="quarter"/>
+          </p:nvPr>
+        </p:nvSpPr>
+        <p:spPr/>
+      </p:sp>
+    </p:spTree>
+  </p:cSld>
+  <p:clrMapOvr>
+    <a:masterClrMapping/>
+  </p:clrMapOvr>
+</p:notes>
+</file>
+
+<file path=ppt/notesSlides/notesSlide3.xml><?xml version="1.0" encoding="utf-8"?>
+<p:notes xmlns:a="http://schemas.openxmlformats.org/drawingml/2006/main" xmlns:p="http://schemas.openxmlformats.org/presentationml/2006/main" xmlns:r="http://schemas.openxmlformats.org/officeDocument/2006/relationships">
+  <p:cSld>
+    <p:spTree>
+      <p:nvGrpSpPr>
+        <p:cNvPr id="1" name=""/>
+        <p:cNvGrpSpPr/>
+        <p:nvPr/>
+      </p:nvGrpSpPr>
+      <p:grpSpPr>
+        <a:xfrm>
+          <a:off x="0" y="0"/>
+          <a:ext cx="0" cy="0"/>
+          <a:chOff x="0" y="0"/>
+          <a:chExt cx="0" cy="0"/>
+        </a:xfrm>
+      </p:grpSpPr>
+      <p:sp>
+        <p:nvSpPr>
+          <p:cNvPr id="2" name="Slide Image Placeholder 1"/>
+          <p:cNvSpPr>
+            <a:spLocks noGrp="1"/>
+          </p:cNvSpPr>
+          <p:nvPr>
+            <p:ph type="sldImg" idx="2"/>
+          </p:nvPr>
+        </p:nvSpPr>
+        <p:spPr/>
+      </p:sp>
+      <p:sp>
+        <p:nvSpPr>
+          <p:cNvPr id="3" name="Notes Placeholder 2"/>
+          <p:cNvSpPr>
+            <a:spLocks noGrp="1"/>
+          </p:cNvSpPr>
+          <p:nvPr>
+            <p:ph type="body" idx="3" sz="quarter"/>
+          </p:nvPr>
+        </p:nvSpPr>
+        <p:spPr/>
+        <p:txBody>
+          <a:bodyPr/>
+          <a:lstStyle/>
+          <a:p>
+            <a:r>
+              <a:t>TP 03 — Diapo 3/10</a:t>
+            </a:r>
+          </a:p>
+          <a:p>
+            <a:r>
+              <a:t>Programmation Python</a:t>
+            </a:r>
+          </a:p>
+          <a:p>
+            <a:r>
+              <a:t>Variables, types, fonctions, I/O, bibliothèques standard</a:t>
+            </a:r>
+          </a:p>
+        </p:txBody>
+      </p:sp>
+      <p:sp>
+        <p:nvSpPr>
+          <p:cNvPr id="4" name="Slide Number Placeholder 3"/>
+          <p:cNvSpPr>
+            <a:spLocks noGrp="1"/>
+          </p:cNvSpPr>
+          <p:nvPr>
+            <p:ph type="sldNum" idx="5" sz="quarter"/>
+          </p:nvPr>
+        </p:nvSpPr>
+        <p:spPr/>
+      </p:sp>
+    </p:spTree>
+  </p:cSld>
+  <p:clrMapOvr>
+    <a:masterClrMapping/>
+  </p:clrMapOvr>
+</p:notes>
+</file>
+
+<file path=ppt/notesSlides/notesSlide4.xml><?xml version="1.0" encoding="utf-8"?>
+<p:notes xmlns:a="http://schemas.openxmlformats.org/drawingml/2006/main" xmlns:p="http://schemas.openxmlformats.org/presentationml/2006/main" xmlns:r="http://schemas.openxmlformats.org/officeDocument/2006/relationships">
+  <p:cSld>
+    <p:spTree>
+      <p:nvGrpSpPr>
+        <p:cNvPr id="1" name=""/>
+        <p:cNvGrpSpPr/>
+        <p:nvPr/>
+      </p:nvGrpSpPr>
+      <p:grpSpPr>
+        <a:xfrm>
+          <a:off x="0" y="0"/>
+          <a:ext cx="0" cy="0"/>
+          <a:chOff x="0" y="0"/>
+          <a:chExt cx="0" cy="0"/>
+        </a:xfrm>
+      </p:grpSpPr>
+      <p:sp>
+        <p:nvSpPr>
+          <p:cNvPr id="2" name="Slide Image Placeholder 1"/>
+          <p:cNvSpPr>
+            <a:spLocks noGrp="1"/>
+          </p:cNvSpPr>
+          <p:nvPr>
+            <p:ph type="sldImg" idx="2"/>
+          </p:nvPr>
+        </p:nvSpPr>
+        <p:spPr/>
+      </p:sp>
+      <p:sp>
+        <p:nvSpPr>
+          <p:cNvPr id="3" name="Notes Placeholder 2"/>
+          <p:cNvSpPr>
+            <a:spLocks noGrp="1"/>
+          </p:cNvSpPr>
+          <p:nvPr>
+            <p:ph type="body" idx="3" sz="quarter"/>
+          </p:nvPr>
+        </p:nvSpPr>
+        <p:spPr/>
+        <p:txBody>
+          <a:bodyPr/>
+          <a:lstStyle/>
+          <a:p>
+            <a:r>
+              <a:t>TP 03 — Diapo 4/10</a:t>
+            </a:r>
+          </a:p>
+          <a:p>
+            <a:r>
+              <a:t>Programmation Python</a:t>
+            </a:r>
+          </a:p>
+          <a:p>
+            <a:r>
+              <a:t>Variables, types, fonctions, I/O, bibliothèques standard</a:t>
+            </a:r>
+          </a:p>
+        </p:txBody>
+      </p:sp>
+      <p:sp>
+        <p:nvSpPr>
+          <p:cNvPr id="4" name="Slide Number Placeholder 3"/>
+          <p:cNvSpPr>
+            <a:spLocks noGrp="1"/>
+          </p:cNvSpPr>
+          <p:nvPr>
+            <p:ph type="sldNum" idx="5" sz="quarter"/>
+          </p:nvPr>
+        </p:nvSpPr>
+        <p:spPr/>
+      </p:sp>
+    </p:spTree>
+  </p:cSld>
+  <p:clrMapOvr>
+    <a:masterClrMapping/>
+  </p:clrMapOvr>
+</p:notes>
+</file>
+
+<file path=ppt/notesSlides/notesSlide5.xml><?xml version="1.0" encoding="utf-8"?>
+<p:notes xmlns:a="http://schemas.openxmlformats.org/drawingml/2006/main" xmlns:p="http://schemas.openxmlformats.org/presentationml/2006/main" xmlns:r="http://schemas.openxmlformats.org/officeDocument/2006/relationships">
+  <p:cSld>
+    <p:spTree>
+      <p:nvGrpSpPr>
+        <p:cNvPr id="1" name=""/>
+        <p:cNvGrpSpPr/>
+        <p:nvPr/>
+      </p:nvGrpSpPr>
+      <p:grpSpPr>
+        <a:xfrm>
+          <a:off x="0" y="0"/>
+          <a:ext cx="0" cy="0"/>
+          <a:chOff x="0" y="0"/>
+          <a:chExt cx="0" cy="0"/>
+        </a:xfrm>
+      </p:grpSpPr>
+      <p:sp>
+        <p:nvSpPr>
+          <p:cNvPr id="2" name="Slide Image Placeholder 1"/>
+          <p:cNvSpPr>
+            <a:spLocks noGrp="1"/>
+          </p:cNvSpPr>
+          <p:nvPr>
+            <p:ph type="sldImg" idx="2"/>
+          </p:nvPr>
+        </p:nvSpPr>
+        <p:spPr/>
+      </p:sp>
+      <p:sp>
+        <p:nvSpPr>
+          <p:cNvPr id="3" name="Notes Placeholder 2"/>
+          <p:cNvSpPr>
+            <a:spLocks noGrp="1"/>
+          </p:cNvSpPr>
+          <p:nvPr>
+            <p:ph type="body" idx="3" sz="quarter"/>
+          </p:nvPr>
+        </p:nvSpPr>
+        <p:spPr/>
+        <p:txBody>
+          <a:bodyPr/>
+          <a:lstStyle/>
+          <a:p>
+            <a:r>
+              <a:t>TP 03 — Diapo 5/10</a:t>
+            </a:r>
+          </a:p>
+          <a:p>
+            <a:r>
+              <a:t>Programmation Python</a:t>
+            </a:r>
+          </a:p>
+          <a:p>
+            <a:r>
+              <a:t>Variables, types, fonctions, I/O, bibliothèques standard</a:t>
+            </a:r>
+          </a:p>
+        </p:txBody>
+      </p:sp>
+      <p:sp>
+        <p:nvSpPr>
+          <p:cNvPr id="4" name="Slide Number Placeholder 3"/>
+          <p:cNvSpPr>
+            <a:spLocks noGrp="1"/>
+          </p:cNvSpPr>
+          <p:nvPr>
+            <p:ph type="sldNum" idx="5" sz="quarter"/>
+          </p:nvPr>
+        </p:nvSpPr>
+        <p:spPr/>
+      </p:sp>
+    </p:spTree>
+  </p:cSld>
+  <p:clrMapOvr>
+    <a:masterClrMapping/>
+  </p:clrMapOvr>
+</p:notes>
+</file>
+
+<file path=ppt/notesSlides/notesSlide6.xml><?xml version="1.0" encoding="utf-8"?>
+<p:notes xmlns:a="http://schemas.openxmlformats.org/drawingml/2006/main" xmlns:p="http://schemas.openxmlformats.org/presentationml/2006/main" xmlns:r="http://schemas.openxmlformats.org/officeDocument/2006/relationships">
+  <p:cSld>
+    <p:spTree>
+      <p:nvGrpSpPr>
+        <p:cNvPr id="1" name=""/>
+        <p:cNvGrpSpPr/>
+        <p:nvPr/>
+      </p:nvGrpSpPr>
+      <p:grpSpPr>
+        <a:xfrm>
+          <a:off x="0" y="0"/>
+          <a:ext cx="0" cy="0"/>
+          <a:chOff x="0" y="0"/>
+          <a:chExt cx="0" cy="0"/>
+        </a:xfrm>
+      </p:grpSpPr>
+      <p:sp>
+        <p:nvSpPr>
+          <p:cNvPr id="2" name="Slide Image Placeholder 1"/>
+          <p:cNvSpPr>
+            <a:spLocks noGrp="1"/>
+          </p:cNvSpPr>
+          <p:nvPr>
+            <p:ph type="sldImg" idx="2"/>
+          </p:nvPr>
+        </p:nvSpPr>
+        <p:spPr/>
+      </p:sp>
+      <p:sp>
+        <p:nvSpPr>
+          <p:cNvPr id="3" name="Notes Placeholder 2"/>
+          <p:cNvSpPr>
+            <a:spLocks noGrp="1"/>
+          </p:cNvSpPr>
+          <p:nvPr>
+            <p:ph type="body" idx="3" sz="quarter"/>
+          </p:nvPr>
+        </p:nvSpPr>
+        <p:spPr/>
+        <p:txBody>
+          <a:bodyPr/>
+          <a:lstStyle/>
+          <a:p>
+            <a:r>
+              <a:t>TP 03 — Diapo 6/10</a:t>
+            </a:r>
+          </a:p>
+          <a:p>
+            <a:r>
+              <a:t>Programmation Python</a:t>
+            </a:r>
+          </a:p>
+          <a:p>
+            <a:r>
+              <a:t>Variables, types, fonctions, I/O, bibliothèques standard</a:t>
+            </a:r>
+          </a:p>
+        </p:txBody>
+      </p:sp>
+      <p:sp>
+        <p:nvSpPr>
+          <p:cNvPr id="4" name="Slide Number Placeholder 3"/>
+          <p:cNvSpPr>
+            <a:spLocks noGrp="1"/>
+          </p:cNvSpPr>
+          <p:nvPr>
+            <p:ph type="sldNum" idx="5" sz="quarter"/>
+          </p:nvPr>
+        </p:nvSpPr>
+        <p:spPr/>
+      </p:sp>
+    </p:spTree>
+  </p:cSld>
+  <p:clrMapOvr>
+    <a:masterClrMapping/>
+  </p:clrMapOvr>
+</p:notes>
+</file>
+
+<file path=ppt/notesSlides/notesSlide7.xml><?xml version="1.0" encoding="utf-8"?>
+<p:notes xmlns:a="http://schemas.openxmlformats.org/drawingml/2006/main" xmlns:p="http://schemas.openxmlformats.org/presentationml/2006/main" xmlns:r="http://schemas.openxmlformats.org/officeDocument/2006/relationships">
+  <p:cSld>
+    <p:spTree>
+      <p:nvGrpSpPr>
+        <p:cNvPr id="1" name=""/>
+        <p:cNvGrpSpPr/>
+        <p:nvPr/>
+      </p:nvGrpSpPr>
+      <p:grpSpPr>
+        <a:xfrm>
+          <a:off x="0" y="0"/>
+          <a:ext cx="0" cy="0"/>
+          <a:chOff x="0" y="0"/>
+          <a:chExt cx="0" cy="0"/>
+        </a:xfrm>
+      </p:grpSpPr>
+      <p:sp>
+        <p:nvSpPr>
+          <p:cNvPr id="2" name="Slide Image Placeholder 1"/>
+          <p:cNvSpPr>
+            <a:spLocks noGrp="1"/>
+          </p:cNvSpPr>
+          <p:nvPr>
+            <p:ph type="sldImg" idx="2"/>
+          </p:nvPr>
+        </p:nvSpPr>
+        <p:spPr/>
+      </p:sp>
+      <p:sp>
+        <p:nvSpPr>
+          <p:cNvPr id="3" name="Notes Placeholder 2"/>
+          <p:cNvSpPr>
+            <a:spLocks noGrp="1"/>
+          </p:cNvSpPr>
+          <p:nvPr>
+            <p:ph type="body" idx="3" sz="quarter"/>
+          </p:nvPr>
+        </p:nvSpPr>
+        <p:spPr/>
+        <p:txBody>
+          <a:bodyPr/>
+          <a:lstStyle/>
+          <a:p>
+            <a:r>
+              <a:t>TP 03 — Diapo 7/10</a:t>
+            </a:r>
+          </a:p>
+          <a:p>
+            <a:r>
+              <a:t>Programmation Python</a:t>
+            </a:r>
+          </a:p>
+          <a:p>
+            <a:r>
+              <a:t>Variables, types, fonctions, I/O, bibliothèques standard</a:t>
+            </a:r>
+          </a:p>
+        </p:txBody>
+      </p:sp>
+      <p:sp>
+        <p:nvSpPr>
+          <p:cNvPr id="4" name="Slide Number Placeholder 3"/>
+          <p:cNvSpPr>
+            <a:spLocks noGrp="1"/>
+          </p:cNvSpPr>
+          <p:nvPr>
+            <p:ph type="sldNum" idx="5" sz="quarter"/>
+          </p:nvPr>
+        </p:nvSpPr>
+        <p:spPr/>
+      </p:sp>
+    </p:spTree>
+  </p:cSld>
+  <p:clrMapOvr>
+    <a:masterClrMapping/>
+  </p:clrMapOvr>
+</p:notes>
+</file>
+
+<file path=ppt/notesSlides/notesSlide8.xml><?xml version="1.0" encoding="utf-8"?>
+<p:notes xmlns:a="http://schemas.openxmlformats.org/drawingml/2006/main" xmlns:p="http://schemas.openxmlformats.org/presentationml/2006/main" xmlns:r="http://schemas.openxmlformats.org/officeDocument/2006/relationships">
+  <p:cSld>
+    <p:spTree>
+      <p:nvGrpSpPr>
+        <p:cNvPr id="1" name=""/>
+        <p:cNvGrpSpPr/>
+        <p:nvPr/>
+      </p:nvGrpSpPr>
+      <p:grpSpPr>
+        <a:xfrm>
+          <a:off x="0" y="0"/>
+          <a:ext cx="0" cy="0"/>
+          <a:chOff x="0" y="0"/>
+          <a:chExt cx="0" cy="0"/>
+        </a:xfrm>
+      </p:grpSpPr>
+      <p:sp>
+        <p:nvSpPr>
+          <p:cNvPr id="2" name="Slide Image Placeholder 1"/>
+          <p:cNvSpPr>
+            <a:spLocks noGrp="1"/>
+          </p:cNvSpPr>
+          <p:nvPr>
+            <p:ph type="sldImg" idx="2"/>
+          </p:nvPr>
+        </p:nvSpPr>
+        <p:spPr/>
+      </p:sp>
+      <p:sp>
+        <p:nvSpPr>
+          <p:cNvPr id="3" name="Notes Placeholder 2"/>
+          <p:cNvSpPr>
+            <a:spLocks noGrp="1"/>
+          </p:cNvSpPr>
+          <p:nvPr>
+            <p:ph type="body" idx="3" sz="quarter"/>
+          </p:nvPr>
+        </p:nvSpPr>
+        <p:spPr/>
+        <p:txBody>
+          <a:bodyPr/>
+          <a:lstStyle/>
+          <a:p>
+            <a:r>
+              <a:t>TP 03 — Diapo 8/10</a:t>
+            </a:r>
+          </a:p>
+          <a:p>
+            <a:r>
+              <a:t>Programmation Python</a:t>
+            </a:r>
+          </a:p>
+          <a:p>
+            <a:r>
+              <a:t>Variables, types, fonctions, I/O, bibliothèques standard</a:t>
+            </a:r>
+          </a:p>
+        </p:txBody>
+      </p:sp>
+      <p:sp>
+        <p:nvSpPr>
+          <p:cNvPr id="4" name="Slide Number Placeholder 3"/>
+          <p:cNvSpPr>
+            <a:spLocks noGrp="1"/>
+          </p:cNvSpPr>
+          <p:nvPr>
+            <p:ph type="sldNum" idx="5" sz="quarter"/>
+          </p:nvPr>
+        </p:nvSpPr>
+        <p:spPr/>
+      </p:sp>
+    </p:spTree>
+  </p:cSld>
+  <p:clrMapOvr>
+    <a:masterClrMapping/>
+  </p:clrMapOvr>
+</p:notes>
+</file>
+
+<file path=ppt/notesSlides/notesSlide9.xml><?xml version="1.0" encoding="utf-8"?>
+<p:notes xmlns:a="http://schemas.openxmlformats.org/drawingml/2006/main" xmlns:p="http://schemas.openxmlformats.org/presentationml/2006/main" xmlns:r="http://schemas.openxmlformats.org/officeDocument/2006/relationships">
+  <p:cSld>
+    <p:spTree>
+      <p:nvGrpSpPr>
+        <p:cNvPr id="1" name=""/>
+        <p:cNvGrpSpPr/>
+        <p:nvPr/>
+      </p:nvGrpSpPr>
+      <p:grpSpPr>
+        <a:xfrm>
+          <a:off x="0" y="0"/>
+          <a:ext cx="0" cy="0"/>
+          <a:chOff x="0" y="0"/>
+          <a:chExt cx="0" cy="0"/>
+        </a:xfrm>
+      </p:grpSpPr>
+      <p:sp>
+        <p:nvSpPr>
+          <p:cNvPr id="2" name="Slide Image Placeholder 1"/>
+          <p:cNvSpPr>
+            <a:spLocks noGrp="1"/>
+          </p:cNvSpPr>
+          <p:nvPr>
+            <p:ph type="sldImg" idx="2"/>
+          </p:nvPr>
+        </p:nvSpPr>
+        <p:spPr/>
+      </p:sp>
+      <p:sp>
+        <p:nvSpPr>
+          <p:cNvPr id="3" name="Notes Placeholder 2"/>
+          <p:cNvSpPr>
+            <a:spLocks noGrp="1"/>
+          </p:cNvSpPr>
+          <p:nvPr>
+            <p:ph type="body" idx="3" sz="quarter"/>
+          </p:nvPr>
+        </p:nvSpPr>
+        <p:spPr/>
+        <p:txBody>
+          <a:bodyPr/>
+          <a:lstStyle/>
+          <a:p>
+            <a:r>
+              <a:t>TP 03 — Diapo 9/10</a:t>
+            </a:r>
+          </a:p>
+          <a:p>
+            <a:r>
+              <a:t>Programmation Python</a:t>
+            </a:r>
+          </a:p>
+          <a:p>
+            <a:r>
+              <a:t>Variables, types, fonctions, I/O, bibliothèques standard</a:t>
+            </a:r>
+          </a:p>
+        </p:txBody>
+      </p:sp>
+      <p:sp>
+        <p:nvSpPr>
+          <p:cNvPr id="4" name="Slide Number Placeholder 3"/>
+          <p:cNvSpPr>
+            <a:spLocks noGrp="1"/>
+          </p:cNvSpPr>
+          <p:nvPr>
+            <p:ph type="sldNum" idx="5" sz="quarter"/>
+          </p:nvPr>
+        </p:nvSpPr>
+        <p:spPr/>
+      </p:sp>
+    </p:spTree>
+  </p:cSld>
+  <p:clrMapOvr>
+    <a:masterClrMapping/>
+  </p:clrMapOvr>
+</p:notes>
 </file>
 
 <file path=ppt/slideLayouts/slideLayout1.xml><?xml version="1.0" encoding="utf-8"?>
@@ -3630,6 +4435,30 @@
           </a:p>
         </p:txBody>
       </p:sp>
+      <p:pic>
+        <p:nvPicPr>
+          <p:cNvPr id="5" name="Picture 4" descr="ENS_s05.png"/>
+          <p:cNvPicPr>
+            <a:picLocks noChangeAspect="1"/>
+          </p:cNvPicPr>
+          <p:nvPr/>
+        </p:nvPicPr>
+        <p:blipFill>
+          <a:blip r:embed="rId3"/>
+          <a:stretch>
+            <a:fillRect/>
+          </a:stretch>
+        </p:blipFill>
+        <p:spPr>
+          <a:xfrm>
+            <a:off x="274320" y="5001768"/>
+            <a:ext cx="2011680" cy="1124712"/>
+          </a:xfrm>
+          <a:prstGeom prst="rect">
+            <a:avLst/>
+          </a:prstGeom>
+        </p:spPr>
+      </p:pic>
     </p:spTree>
   </p:cSld>
   <p:clrMapOvr>
@@ -3747,6 +4576,30 @@
           </a:p>
         </p:txBody>
       </p:sp>
+      <p:pic>
+        <p:nvPicPr>
+          <p:cNvPr id="5" name="Picture 4" descr="ENS_s01.png"/>
+          <p:cNvPicPr>
+            <a:picLocks noChangeAspect="1"/>
+          </p:cNvPicPr>
+          <p:nvPr/>
+        </p:nvPicPr>
+        <p:blipFill>
+          <a:blip r:embed="rId3"/>
+          <a:stretch>
+            <a:fillRect/>
+          </a:stretch>
+        </p:blipFill>
+        <p:spPr>
+          <a:xfrm>
+            <a:off x="6858000" y="5001768"/>
+            <a:ext cx="2011680" cy="1124712"/>
+          </a:xfrm>
+          <a:prstGeom prst="rect">
+            <a:avLst/>
+          </a:prstGeom>
+        </p:spPr>
+      </p:pic>
     </p:spTree>
   </p:cSld>
   <p:clrMapOvr>
@@ -3981,6 +4834,30 @@
           </a:p>
         </p:txBody>
       </p:sp>
+      <p:pic>
+        <p:nvPicPr>
+          <p:cNvPr id="5" name="Picture 4" descr="ENS_s03.png"/>
+          <p:cNvPicPr>
+            <a:picLocks noChangeAspect="1"/>
+          </p:cNvPicPr>
+          <p:nvPr/>
+        </p:nvPicPr>
+        <p:blipFill>
+          <a:blip r:embed="rId3"/>
+          <a:stretch>
+            <a:fillRect/>
+          </a:stretch>
+        </p:blipFill>
+        <p:spPr>
+          <a:xfrm>
+            <a:off x="274320" y="5001768"/>
+            <a:ext cx="2011680" cy="1124712"/>
+          </a:xfrm>
+          <a:prstGeom prst="rect">
+            <a:avLst/>
+          </a:prstGeom>
+        </p:spPr>
+      </p:pic>
     </p:spTree>
   </p:cSld>
   <p:clrMapOvr>
@@ -4215,6 +5092,30 @@
           </a:p>
         </p:txBody>
       </p:sp>
+      <p:pic>
+        <p:nvPicPr>
+          <p:cNvPr id="5" name="Picture 4" descr="ENS_s05.png"/>
+          <p:cNvPicPr>
+            <a:picLocks noChangeAspect="1"/>
+          </p:cNvPicPr>
+          <p:nvPr/>
+        </p:nvPicPr>
+        <p:blipFill>
+          <a:blip r:embed="rId3"/>
+          <a:stretch>
+            <a:fillRect/>
+          </a:stretch>
+        </p:blipFill>
+        <p:spPr>
+          <a:xfrm>
+            <a:off x="6858000" y="1005840"/>
+            <a:ext cx="2011680" cy="1124712"/>
+          </a:xfrm>
+          <a:prstGeom prst="rect">
+            <a:avLst/>
+          </a:prstGeom>
+        </p:spPr>
+      </p:pic>
     </p:spTree>
   </p:cSld>
   <p:clrMapOvr>
@@ -4457,6 +5358,30 @@
           </a:p>
         </p:txBody>
       </p:sp>
+      <p:pic>
+        <p:nvPicPr>
+          <p:cNvPr id="5" name="Picture 4" descr="ENS_s05.png"/>
+          <p:cNvPicPr>
+            <a:picLocks noChangeAspect="1"/>
+          </p:cNvPicPr>
+          <p:nvPr/>
+        </p:nvPicPr>
+        <p:blipFill>
+          <a:blip r:embed="rId3"/>
+          <a:stretch>
+            <a:fillRect/>
+          </a:stretch>
+        </p:blipFill>
+        <p:spPr>
+          <a:xfrm>
+            <a:off x="6858000" y="5001768"/>
+            <a:ext cx="2011680" cy="1124712"/>
+          </a:xfrm>
+          <a:prstGeom prst="rect">
+            <a:avLst/>
+          </a:prstGeom>
+        </p:spPr>
+      </p:pic>
     </p:spTree>
   </p:cSld>
   <p:clrMapOvr>

--- a/cours/Module Informatique ENS/Département Anglais/ENS 1ère année/TP_Informatique_ENS_1ère_année_EN_03.pptx
+++ b/cours/Module Informatique ENS/Département Anglais/ENS 1ère année/TP_Informatique_ENS_1ère_année_EN_03.pptx
@@ -3997,7 +3997,7 @@
           <a:solidFill>
             <a:schemeClr val="tx1"/>
           </a:solidFill>
-          <a:latin typeface="+mj-lt"/>
+          <a:latin typeface="Poppins"/>
           <a:ea typeface="+mj-ea"/>
           <a:cs typeface="+mj-cs"/>
         </a:defRPr>
@@ -4014,7 +4014,7 @@
           <a:solidFill>
             <a:schemeClr val="tx1"/>
           </a:solidFill>
-          <a:latin typeface="+mn-lt"/>
+          <a:latin typeface="Poppins"/>
           <a:ea typeface="+mn-ea"/>
           <a:cs typeface="+mn-cs"/>
         </a:defRPr>
@@ -4029,7 +4029,7 @@
           <a:solidFill>
             <a:schemeClr val="tx1"/>
           </a:solidFill>
-          <a:latin typeface="+mn-lt"/>
+          <a:latin typeface="Poppins"/>
           <a:ea typeface="+mn-ea"/>
           <a:cs typeface="+mn-cs"/>
         </a:defRPr>
@@ -4044,7 +4044,7 @@
           <a:solidFill>
             <a:schemeClr val="tx1"/>
           </a:solidFill>
-          <a:latin typeface="+mn-lt"/>
+          <a:latin typeface="Poppins"/>
           <a:ea typeface="+mn-ea"/>
           <a:cs typeface="+mn-cs"/>
         </a:defRPr>
@@ -4059,7 +4059,7 @@
           <a:solidFill>
             <a:schemeClr val="tx1"/>
           </a:solidFill>
-          <a:latin typeface="+mn-lt"/>
+          <a:latin typeface="Poppins"/>
           <a:ea typeface="+mn-ea"/>
           <a:cs typeface="+mn-cs"/>
         </a:defRPr>
@@ -4074,7 +4074,7 @@
           <a:solidFill>
             <a:schemeClr val="tx1"/>
           </a:solidFill>
-          <a:latin typeface="+mn-lt"/>
+          <a:latin typeface="Poppins"/>
           <a:ea typeface="+mn-ea"/>
           <a:cs typeface="+mn-cs"/>
         </a:defRPr>
@@ -4089,7 +4089,7 @@
           <a:solidFill>
             <a:schemeClr val="tx1"/>
           </a:solidFill>
-          <a:latin typeface="+mn-lt"/>
+          <a:latin typeface="Poppins"/>
           <a:ea typeface="+mn-ea"/>
           <a:cs typeface="+mn-cs"/>
         </a:defRPr>
@@ -4104,7 +4104,7 @@
           <a:solidFill>
             <a:schemeClr val="tx1"/>
           </a:solidFill>
-          <a:latin typeface="+mn-lt"/>
+          <a:latin typeface="Poppins"/>
           <a:ea typeface="+mn-ea"/>
           <a:cs typeface="+mn-cs"/>
         </a:defRPr>
@@ -4119,7 +4119,7 @@
           <a:solidFill>
             <a:schemeClr val="tx1"/>
           </a:solidFill>
-          <a:latin typeface="+mn-lt"/>
+          <a:latin typeface="Poppins"/>
           <a:ea typeface="+mn-ea"/>
           <a:cs typeface="+mn-cs"/>
         </a:defRPr>
@@ -4134,7 +4134,7 @@
           <a:solidFill>
             <a:schemeClr val="tx1"/>
           </a:solidFill>
-          <a:latin typeface="+mn-lt"/>
+          <a:latin typeface="Poppins"/>
           <a:ea typeface="+mn-ea"/>
           <a:cs typeface="+mn-cs"/>
         </a:defRPr>
@@ -4149,7 +4149,7 @@
           <a:solidFill>
             <a:schemeClr val="tx1"/>
           </a:solidFill>
-          <a:latin typeface="+mn-lt"/>
+          <a:latin typeface="Poppins"/>
           <a:ea typeface="+mn-ea"/>
           <a:cs typeface="+mn-cs"/>
         </a:defRPr>
@@ -4159,7 +4159,7 @@
           <a:solidFill>
             <a:schemeClr val="tx1"/>
           </a:solidFill>
-          <a:latin typeface="+mn-lt"/>
+          <a:latin typeface="Poppins"/>
           <a:ea typeface="+mn-ea"/>
           <a:cs typeface="+mn-cs"/>
         </a:defRPr>
@@ -4169,7 +4169,7 @@
           <a:solidFill>
             <a:schemeClr val="tx1"/>
           </a:solidFill>
-          <a:latin typeface="+mn-lt"/>
+          <a:latin typeface="Poppins"/>
           <a:ea typeface="+mn-ea"/>
           <a:cs typeface="+mn-cs"/>
         </a:defRPr>
@@ -4179,7 +4179,7 @@
           <a:solidFill>
             <a:schemeClr val="tx1"/>
           </a:solidFill>
-          <a:latin typeface="+mn-lt"/>
+          <a:latin typeface="Poppins"/>
           <a:ea typeface="+mn-ea"/>
           <a:cs typeface="+mn-cs"/>
         </a:defRPr>
@@ -4189,7 +4189,7 @@
           <a:solidFill>
             <a:schemeClr val="tx1"/>
           </a:solidFill>
-          <a:latin typeface="+mn-lt"/>
+          <a:latin typeface="Poppins"/>
           <a:ea typeface="+mn-ea"/>
           <a:cs typeface="+mn-cs"/>
         </a:defRPr>
@@ -4199,7 +4199,7 @@
           <a:solidFill>
             <a:schemeClr val="tx1"/>
           </a:solidFill>
-          <a:latin typeface="+mn-lt"/>
+          <a:latin typeface="Poppins"/>
           <a:ea typeface="+mn-ea"/>
           <a:cs typeface="+mn-cs"/>
         </a:defRPr>
@@ -4209,7 +4209,7 @@
           <a:solidFill>
             <a:schemeClr val="tx1"/>
           </a:solidFill>
-          <a:latin typeface="+mn-lt"/>
+          <a:latin typeface="Poppins"/>
           <a:ea typeface="+mn-ea"/>
           <a:cs typeface="+mn-cs"/>
         </a:defRPr>
@@ -4219,7 +4219,7 @@
           <a:solidFill>
             <a:schemeClr val="tx1"/>
           </a:solidFill>
-          <a:latin typeface="+mn-lt"/>
+          <a:latin typeface="Poppins"/>
           <a:ea typeface="+mn-ea"/>
           <a:cs typeface="+mn-cs"/>
         </a:defRPr>
@@ -4229,7 +4229,7 @@
           <a:solidFill>
             <a:schemeClr val="tx1"/>
           </a:solidFill>
-          <a:latin typeface="+mn-lt"/>
+          <a:latin typeface="Poppins"/>
           <a:ea typeface="+mn-ea"/>
           <a:cs typeface="+mn-cs"/>
         </a:defRPr>
@@ -4315,13 +4315,52 @@
           <a:p>
             <a:pPr algn="ctr">
               <a:defRPr sz="900">
-                <a:solidFill>
-                  <a:srgbClr val="404040"/>
-                </a:solidFill>
+                <a:solidFill>val="45586A"/&gt;</a:solidFill>
               </a:defRPr>
             </a:pPr>
             <a:r>
               <a:t>TP Computer Science Lab 03  •  Diapositive 1/10</a:t>
+            </a:r>
+          </a:p>
+        </p:txBody>
+      </p:sp>
+      <p:sp>
+        <p:nvSpPr>
+          <p:cNvPr id="990001" name="Pied de page FLE"/>
+          <p:cNvSpPr>
+            <a:spLocks noGrp="1"/>
+          </p:cNvSpPr>
+          <p:nvPr/>
+        </p:nvSpPr>
+        <p:spPr>
+          <a:xfrm>
+            <a:off x="3611880" y="-137160"/>
+            <a:ext cx="4572000" cy="274320"/>
+          </a:xfrm>
+          <a:prstGeom prst="rect">
+            <a:avLst/>
+          </a:prstGeom>
+        </p:spPr>
+        <p:txBody>
+          <a:bodyPr anchor="b"/>
+          <a:lstStyle/>
+          <a:p>
+            <a:pPr algn="r">
+              <a:defRPr sz="900">
+                <a:solidFill>
+                  <a:srgbClr val="9AA7B6"/>
+                </a:solidFill>
+                <a:latin typeface="Poppins"/>
+              </a:defRPr>
+            </a:pPr>
+            <a:r>
+              <a:rPr lang="fr-FR" sz="900">
+                <a:solidFill>
+                  <a:srgbClr val="9AA7B6"/>
+                </a:solidFill>
+                <a:latin typeface="Poppins"/>
+              </a:rPr>
+              <a:t>Université de Mostaganem — Dr. Madani BELACEL</a:t>
             </a:r>
           </a:p>
         </p:txBody>
@@ -4424,9 +4463,7 @@
           <a:p>
             <a:pPr algn="ctr">
               <a:defRPr sz="900">
-                <a:solidFill>
-                  <a:srgbClr val="404040"/>
-                </a:solidFill>
+                <a:solidFill>val="45586A"/&gt;</a:solidFill>
               </a:defRPr>
             </a:pPr>
             <a:r>
@@ -4459,6 +4496,47 @@
           </a:prstGeom>
         </p:spPr>
       </p:pic>
+      <p:sp>
+        <p:nvSpPr>
+          <p:cNvPr id="990001" name="Pied de page FLE"/>
+          <p:cNvSpPr>
+            <a:spLocks noGrp="1"/>
+          </p:cNvSpPr>
+          <p:nvPr/>
+        </p:nvSpPr>
+        <p:spPr>
+          <a:xfrm>
+            <a:off x="3611880" y="-137160"/>
+            <a:ext cx="4572000" cy="274320"/>
+          </a:xfrm>
+          <a:prstGeom prst="rect">
+            <a:avLst/>
+          </a:prstGeom>
+        </p:spPr>
+        <p:txBody>
+          <a:bodyPr anchor="b"/>
+          <a:lstStyle/>
+          <a:p>
+            <a:pPr algn="r">
+              <a:defRPr sz="900">
+                <a:solidFill>
+                  <a:srgbClr val="9AA7B6"/>
+                </a:solidFill>
+                <a:latin typeface="Poppins"/>
+              </a:defRPr>
+            </a:pPr>
+            <a:r>
+              <a:rPr lang="fr-FR" sz="900">
+                <a:solidFill>
+                  <a:srgbClr val="9AA7B6"/>
+                </a:solidFill>
+                <a:latin typeface="Poppins"/>
+              </a:rPr>
+              <a:t>Université de Mostaganem — Dr. Madani BELACEL</a:t>
+            </a:r>
+          </a:p>
+        </p:txBody>
+      </p:sp>
     </p:spTree>
   </p:cSld>
   <p:clrMapOvr>
@@ -4565,9 +4643,7 @@
           <a:p>
             <a:pPr algn="ctr">
               <a:defRPr sz="900">
-                <a:solidFill>
-                  <a:srgbClr val="404040"/>
-                </a:solidFill>
+                <a:solidFill>val="45586A"/&gt;</a:solidFill>
               </a:defRPr>
             </a:pPr>
             <a:r>
@@ -4600,6 +4676,47 @@
           </a:prstGeom>
         </p:spPr>
       </p:pic>
+      <p:sp>
+        <p:nvSpPr>
+          <p:cNvPr id="990001" name="Pied de page FLE"/>
+          <p:cNvSpPr>
+            <a:spLocks noGrp="1"/>
+          </p:cNvSpPr>
+          <p:nvPr/>
+        </p:nvSpPr>
+        <p:spPr>
+          <a:xfrm>
+            <a:off x="3611880" y="-137160"/>
+            <a:ext cx="4572000" cy="274320"/>
+          </a:xfrm>
+          <a:prstGeom prst="rect">
+            <a:avLst/>
+          </a:prstGeom>
+        </p:spPr>
+        <p:txBody>
+          <a:bodyPr anchor="b"/>
+          <a:lstStyle/>
+          <a:p>
+            <a:pPr algn="r">
+              <a:defRPr sz="900">
+                <a:solidFill>
+                  <a:srgbClr val="9AA7B6"/>
+                </a:solidFill>
+                <a:latin typeface="Poppins"/>
+              </a:defRPr>
+            </a:pPr>
+            <a:r>
+              <a:rPr lang="fr-FR" sz="900">
+                <a:solidFill>
+                  <a:srgbClr val="9AA7B6"/>
+                </a:solidFill>
+                <a:latin typeface="Poppins"/>
+              </a:rPr>
+              <a:t>Université de Mostaganem — Dr. Madani BELACEL</a:t>
+            </a:r>
+          </a:p>
+        </p:txBody>
+      </p:sp>
     </p:spTree>
   </p:cSld>
   <p:clrMapOvr>
@@ -4706,13 +4823,52 @@
           <a:p>
             <a:pPr algn="ctr">
               <a:defRPr sz="900">
-                <a:solidFill>
-                  <a:srgbClr val="404040"/>
-                </a:solidFill>
+                <a:solidFill>val="45586A"/&gt;</a:solidFill>
               </a:defRPr>
             </a:pPr>
             <a:r>
               <a:t>TP Computer Science Lab 03  •  Diapositive 3/10</a:t>
+            </a:r>
+          </a:p>
+        </p:txBody>
+      </p:sp>
+      <p:sp>
+        <p:nvSpPr>
+          <p:cNvPr id="990001" name="Pied de page FLE"/>
+          <p:cNvSpPr>
+            <a:spLocks noGrp="1"/>
+          </p:cNvSpPr>
+          <p:nvPr/>
+        </p:nvSpPr>
+        <p:spPr>
+          <a:xfrm>
+            <a:off x="3611880" y="-137160"/>
+            <a:ext cx="4572000" cy="274320"/>
+          </a:xfrm>
+          <a:prstGeom prst="rect">
+            <a:avLst/>
+          </a:prstGeom>
+        </p:spPr>
+        <p:txBody>
+          <a:bodyPr anchor="b"/>
+          <a:lstStyle/>
+          <a:p>
+            <a:pPr algn="r">
+              <a:defRPr sz="900">
+                <a:solidFill>
+                  <a:srgbClr val="9AA7B6"/>
+                </a:solidFill>
+                <a:latin typeface="Poppins"/>
+              </a:defRPr>
+            </a:pPr>
+            <a:r>
+              <a:rPr lang="fr-FR" sz="900">
+                <a:solidFill>
+                  <a:srgbClr val="9AA7B6"/>
+                </a:solidFill>
+                <a:latin typeface="Poppins"/>
+              </a:rPr>
+              <a:t>Université de Mostaganem — Dr. Madani BELACEL</a:t>
             </a:r>
           </a:p>
         </p:txBody>
@@ -4823,9 +4979,7 @@
           <a:p>
             <a:pPr algn="ctr">
               <a:defRPr sz="900">
-                <a:solidFill>
-                  <a:srgbClr val="404040"/>
-                </a:solidFill>
+                <a:solidFill>val="45586A"/&gt;</a:solidFill>
               </a:defRPr>
             </a:pPr>
             <a:r>
@@ -4858,6 +5012,47 @@
           </a:prstGeom>
         </p:spPr>
       </p:pic>
+      <p:sp>
+        <p:nvSpPr>
+          <p:cNvPr id="990001" name="Pied de page FLE"/>
+          <p:cNvSpPr>
+            <a:spLocks noGrp="1"/>
+          </p:cNvSpPr>
+          <p:nvPr/>
+        </p:nvSpPr>
+        <p:spPr>
+          <a:xfrm>
+            <a:off x="3611880" y="-137160"/>
+            <a:ext cx="4572000" cy="274320"/>
+          </a:xfrm>
+          <a:prstGeom prst="rect">
+            <a:avLst/>
+          </a:prstGeom>
+        </p:spPr>
+        <p:txBody>
+          <a:bodyPr anchor="b"/>
+          <a:lstStyle/>
+          <a:p>
+            <a:pPr algn="r">
+              <a:defRPr sz="900">
+                <a:solidFill>
+                  <a:srgbClr val="9AA7B6"/>
+                </a:solidFill>
+                <a:latin typeface="Poppins"/>
+              </a:defRPr>
+            </a:pPr>
+            <a:r>
+              <a:rPr lang="fr-FR" sz="900">
+                <a:solidFill>
+                  <a:srgbClr val="9AA7B6"/>
+                </a:solidFill>
+                <a:latin typeface="Poppins"/>
+              </a:rPr>
+              <a:t>Université de Mostaganem — Dr. Madani BELACEL</a:t>
+            </a:r>
+          </a:p>
+        </p:txBody>
+      </p:sp>
     </p:spTree>
   </p:cSld>
   <p:clrMapOvr>
@@ -4964,13 +5159,52 @@
           <a:p>
             <a:pPr algn="ctr">
               <a:defRPr sz="900">
-                <a:solidFill>
-                  <a:srgbClr val="404040"/>
-                </a:solidFill>
+                <a:solidFill>val="45586A"/&gt;</a:solidFill>
               </a:defRPr>
             </a:pPr>
             <a:r>
               <a:t>TP Computer Science Lab 03  •  Diapositive 5/10</a:t>
+            </a:r>
+          </a:p>
+        </p:txBody>
+      </p:sp>
+      <p:sp>
+        <p:nvSpPr>
+          <p:cNvPr id="990001" name="Pied de page FLE"/>
+          <p:cNvSpPr>
+            <a:spLocks noGrp="1"/>
+          </p:cNvSpPr>
+          <p:nvPr/>
+        </p:nvSpPr>
+        <p:spPr>
+          <a:xfrm>
+            <a:off x="3611880" y="-137160"/>
+            <a:ext cx="4572000" cy="274320"/>
+          </a:xfrm>
+          <a:prstGeom prst="rect">
+            <a:avLst/>
+          </a:prstGeom>
+        </p:spPr>
+        <p:txBody>
+          <a:bodyPr anchor="b"/>
+          <a:lstStyle/>
+          <a:p>
+            <a:pPr algn="r">
+              <a:defRPr sz="900">
+                <a:solidFill>
+                  <a:srgbClr val="9AA7B6"/>
+                </a:solidFill>
+                <a:latin typeface="Poppins"/>
+              </a:defRPr>
+            </a:pPr>
+            <a:r>
+              <a:rPr lang="fr-FR" sz="900">
+                <a:solidFill>
+                  <a:srgbClr val="9AA7B6"/>
+                </a:solidFill>
+                <a:latin typeface="Poppins"/>
+              </a:rPr>
+              <a:t>Université de Mostaganem — Dr. Madani BELACEL</a:t>
             </a:r>
           </a:p>
         </p:txBody>
@@ -5081,9 +5315,7 @@
           <a:p>
             <a:pPr algn="ctr">
               <a:defRPr sz="900">
-                <a:solidFill>
-                  <a:srgbClr val="404040"/>
-                </a:solidFill>
+                <a:solidFill>val="45586A"/&gt;</a:solidFill>
               </a:defRPr>
             </a:pPr>
             <a:r>
@@ -5116,6 +5348,47 @@
           </a:prstGeom>
         </p:spPr>
       </p:pic>
+      <p:sp>
+        <p:nvSpPr>
+          <p:cNvPr id="990001" name="Pied de page FLE"/>
+          <p:cNvSpPr>
+            <a:spLocks noGrp="1"/>
+          </p:cNvSpPr>
+          <p:nvPr/>
+        </p:nvSpPr>
+        <p:spPr>
+          <a:xfrm>
+            <a:off x="3611880" y="-137160"/>
+            <a:ext cx="4572000" cy="274320"/>
+          </a:xfrm>
+          <a:prstGeom prst="rect">
+            <a:avLst/>
+          </a:prstGeom>
+        </p:spPr>
+        <p:txBody>
+          <a:bodyPr anchor="b"/>
+          <a:lstStyle/>
+          <a:p>
+            <a:pPr algn="r">
+              <a:defRPr sz="900">
+                <a:solidFill>
+                  <a:srgbClr val="9AA7B6"/>
+                </a:solidFill>
+                <a:latin typeface="Poppins"/>
+              </a:defRPr>
+            </a:pPr>
+            <a:r>
+              <a:rPr lang="fr-FR" sz="900">
+                <a:solidFill>
+                  <a:srgbClr val="9AA7B6"/>
+                </a:solidFill>
+                <a:latin typeface="Poppins"/>
+              </a:rPr>
+              <a:t>Université de Mostaganem — Dr. Madani BELACEL</a:t>
+            </a:r>
+          </a:p>
+        </p:txBody>
+      </p:sp>
     </p:spTree>
   </p:cSld>
   <p:clrMapOvr>
@@ -5222,13 +5495,52 @@
           <a:p>
             <a:pPr algn="ctr">
               <a:defRPr sz="900">
-                <a:solidFill>
-                  <a:srgbClr val="404040"/>
-                </a:solidFill>
+                <a:solidFill>val="45586A"/&gt;</a:solidFill>
               </a:defRPr>
             </a:pPr>
             <a:r>
               <a:t>TP Computer Science Lab 03  •  Diapositive 7/10</a:t>
+            </a:r>
+          </a:p>
+        </p:txBody>
+      </p:sp>
+      <p:sp>
+        <p:nvSpPr>
+          <p:cNvPr id="990001" name="Pied de page FLE"/>
+          <p:cNvSpPr>
+            <a:spLocks noGrp="1"/>
+          </p:cNvSpPr>
+          <p:nvPr/>
+        </p:nvSpPr>
+        <p:spPr>
+          <a:xfrm>
+            <a:off x="3611880" y="-137160"/>
+            <a:ext cx="4572000" cy="274320"/>
+          </a:xfrm>
+          <a:prstGeom prst="rect">
+            <a:avLst/>
+          </a:prstGeom>
+        </p:spPr>
+        <p:txBody>
+          <a:bodyPr anchor="b"/>
+          <a:lstStyle/>
+          <a:p>
+            <a:pPr algn="r">
+              <a:defRPr sz="900">
+                <a:solidFill>
+                  <a:srgbClr val="9AA7B6"/>
+                </a:solidFill>
+                <a:latin typeface="Poppins"/>
+              </a:defRPr>
+            </a:pPr>
+            <a:r>
+              <a:rPr lang="fr-FR" sz="900">
+                <a:solidFill>
+                  <a:srgbClr val="9AA7B6"/>
+                </a:solidFill>
+                <a:latin typeface="Poppins"/>
+              </a:rPr>
+              <a:t>Université de Mostaganem — Dr. Madani BELACEL</a:t>
             </a:r>
           </a:p>
         </p:txBody>
@@ -5347,9 +5659,7 @@
           <a:p>
             <a:pPr algn="ctr">
               <a:defRPr sz="900">
-                <a:solidFill>
-                  <a:srgbClr val="404040"/>
-                </a:solidFill>
+                <a:solidFill>val="45586A"/&gt;</a:solidFill>
               </a:defRPr>
             </a:pPr>
             <a:r>
@@ -5382,6 +5692,47 @@
           </a:prstGeom>
         </p:spPr>
       </p:pic>
+      <p:sp>
+        <p:nvSpPr>
+          <p:cNvPr id="990001" name="Pied de page FLE"/>
+          <p:cNvSpPr>
+            <a:spLocks noGrp="1"/>
+          </p:cNvSpPr>
+          <p:nvPr/>
+        </p:nvSpPr>
+        <p:spPr>
+          <a:xfrm>
+            <a:off x="3611880" y="-137160"/>
+            <a:ext cx="4572000" cy="274320"/>
+          </a:xfrm>
+          <a:prstGeom prst="rect">
+            <a:avLst/>
+          </a:prstGeom>
+        </p:spPr>
+        <p:txBody>
+          <a:bodyPr anchor="b"/>
+          <a:lstStyle/>
+          <a:p>
+            <a:pPr algn="r">
+              <a:defRPr sz="900">
+                <a:solidFill>
+                  <a:srgbClr val="9AA7B6"/>
+                </a:solidFill>
+                <a:latin typeface="Poppins"/>
+              </a:defRPr>
+            </a:pPr>
+            <a:r>
+              <a:rPr lang="fr-FR" sz="900">
+                <a:solidFill>
+                  <a:srgbClr val="9AA7B6"/>
+                </a:solidFill>
+                <a:latin typeface="Poppins"/>
+              </a:rPr>
+              <a:t>Université de Mostaganem — Dr. Madani BELACEL</a:t>
+            </a:r>
+          </a:p>
+        </p:txBody>
+      </p:sp>
     </p:spTree>
   </p:cSld>
   <p:clrMapOvr>
@@ -5488,13 +5839,52 @@
           <a:p>
             <a:pPr algn="ctr">
               <a:defRPr sz="900">
-                <a:solidFill>
-                  <a:srgbClr val="404040"/>
-                </a:solidFill>
+                <a:solidFill>val="45586A"/&gt;</a:solidFill>
               </a:defRPr>
             </a:pPr>
             <a:r>
               <a:t>TP Computer Science Lab 03  •  Diapositive 9/10</a:t>
+            </a:r>
+          </a:p>
+        </p:txBody>
+      </p:sp>
+      <p:sp>
+        <p:nvSpPr>
+          <p:cNvPr id="990001" name="Pied de page FLE"/>
+          <p:cNvSpPr>
+            <a:spLocks noGrp="1"/>
+          </p:cNvSpPr>
+          <p:nvPr/>
+        </p:nvSpPr>
+        <p:spPr>
+          <a:xfrm>
+            <a:off x="3611880" y="-137160"/>
+            <a:ext cx="4572000" cy="274320"/>
+          </a:xfrm>
+          <a:prstGeom prst="rect">
+            <a:avLst/>
+          </a:prstGeom>
+        </p:spPr>
+        <p:txBody>
+          <a:bodyPr anchor="b"/>
+          <a:lstStyle/>
+          <a:p>
+            <a:pPr algn="r">
+              <a:defRPr sz="900">
+                <a:solidFill>
+                  <a:srgbClr val="9AA7B6"/>
+                </a:solidFill>
+                <a:latin typeface="Poppins"/>
+              </a:defRPr>
+            </a:pPr>
+            <a:r>
+              <a:rPr lang="fr-FR" sz="900">
+                <a:solidFill>
+                  <a:srgbClr val="9AA7B6"/>
+                </a:solidFill>
+                <a:latin typeface="Poppins"/>
+              </a:rPr>
+              <a:t>Université de Mostaganem — Dr. Madani BELACEL</a:t>
             </a:r>
           </a:p>
         </p:txBody>
@@ -5553,7 +5943,7 @@
     </a:clrScheme>
     <a:fontScheme name="Office">
       <a:majorFont>
-        <a:latin typeface="Calibri"/>
+        <a:latin typeface="Poppins"/>
         <a:ea typeface=""/>
         <a:cs typeface=""/>
         <a:font script="Jpan" typeface="ＭＳ Ｐゴシック"/>
@@ -5588,7 +5978,7 @@
         <a:font script="Geor" typeface="Sylfaen"/>
       </a:majorFont>
       <a:minorFont>
-        <a:latin typeface="Calibri"/>
+        <a:latin typeface="Poppins"/>
         <a:ea typeface=""/>
         <a:cs typeface=""/>
         <a:font script="Jpan" typeface="ＭＳ Ｐゴシック"/>
